--- a/classes/parte-2-criptografia-aplicada/049-cifrado-asimetrico-rsa/clase-049-presentacion.pptx
+++ b/classes/parte-2-criptografia-aplicada/049-cifrado-asimetrico-rsa/clase-049-presentacion.pptx
@@ -17,6 +17,9 @@
     <p:sldId id="265" r:id="rId16"/>
     <p:sldId id="266" r:id="rId17"/>
     <p:sldId id="267" r:id="rId18"/>
+    <p:sldId id="268" r:id="rId19"/>
+    <p:sldId id="269" r:id="rId20"/>
+    <p:sldId id="270" r:id="rId21"/>
   </p:sldIdLst>
   <p:sldSz cx="9144000" cy="6858000" type="screen4x3"/>
   <p:notesSz cx="6858000" cy="9144000"/>
@@ -3198,7 +3201,7 @@
                   <a:srgbClr val="0B3D2E"/>
                 </a:solidFill>
               </a:rPr>
-              <a:t>⚠️ Errores comunes</a:t>
+              <a:t>✍️ Ejercicios</a:t>
             </a:r>
           </a:p>
         </p:txBody>
@@ -3236,67 +3239,82 @@
                   <a:srgbClr val="22282E"/>
                 </a:solidFill>
               </a:rPr>
-              <a:t>•  data too large for key size — Intentas cifrar datos grandes con RSA; usa cifrado híbrido</a:t>
-            </a:r>
-          </a:p>
-          <a:p>
-            <a:pPr>
-              <a:spcAft>
-                <a:spcPts val="600"/>
-              </a:spcAft>
-            </a:pPr>
-            <a:r>
-              <a:rPr sz="1500">
-                <a:solidFill>
-                  <a:srgbClr val="22282E"/>
-                </a:solidFill>
-              </a:rPr>
-              <a:t>•  Cifrado determinista — Usaste RSA sin OAEP; aplica padding aleatorizado</a:t>
-            </a:r>
-          </a:p>
-          <a:p>
-            <a:pPr>
-              <a:spcAft>
-                <a:spcPts val="600"/>
-              </a:spcAft>
-            </a:pPr>
-            <a:r>
-              <a:rPr sz="1500">
-                <a:solidFill>
-                  <a:srgbClr val="22282E"/>
-                </a:solidFill>
-              </a:rPr>
-              <a:t>•  Clave de 1024 bits — Insegura; usa 3072 bits o migra a ECC</a:t>
-            </a:r>
-          </a:p>
-          <a:p>
-            <a:pPr>
-              <a:spcAft>
-                <a:spcPts val="600"/>
-              </a:spcAft>
-            </a:pPr>
-            <a:r>
-              <a:rPr sz="1500">
-                <a:solidFill>
-                  <a:srgbClr val="22282E"/>
-                </a:solidFill>
-              </a:rPr>
-              <a:t>•  Firmar cifrando con la privada "a mano" — Usa PSS, no operaciones RSA crudas</a:t>
-            </a:r>
-          </a:p>
-          <a:p>
-            <a:pPr>
-              <a:spcAft>
-                <a:spcPts val="600"/>
-              </a:spcAft>
-            </a:pPr>
-            <a:r>
-              <a:rPr sz="1500">
-                <a:solidFill>
-                  <a:srgbClr val="22282E"/>
-                </a:solidFill>
-              </a:rPr>
-              <a:t>•  Exponente d filtrado o p,q reutilizados — Compromete todo; genera claves con CSPRNG y no reutilices primos</a:t>
+              <a:t>•  Calcula a mano un RSA de juguete con p=61, q=53, e=17; halla d y cifra m=65.</a:t>
+            </a:r>
+          </a:p>
+          <a:p>
+            <a:pPr>
+              <a:spcAft>
+                <a:spcPts val="600"/>
+              </a:spcAft>
+            </a:pPr>
+            <a:r>
+              <a:rPr sz="1500">
+                <a:solidFill>
+                  <a:srgbClr val="22282E"/>
+                </a:solidFill>
+              </a:rPr>
+              <a:t>•  Explica por qué e=65537 es una elección común.</a:t>
+            </a:r>
+          </a:p>
+          <a:p>
+            <a:pPr>
+              <a:spcAft>
+                <a:spcPts val="600"/>
+              </a:spcAft>
+            </a:pPr>
+            <a:r>
+              <a:rPr sz="1500">
+                <a:solidFill>
+                  <a:srgbClr val="22282E"/>
+                </a:solidFill>
+              </a:rPr>
+              <a:t>•  ¿Por qué RSA textbook es maleable? Da un ejemplo con multiplicación.</a:t>
+            </a:r>
+          </a:p>
+          <a:p>
+            <a:pPr>
+              <a:spcAft>
+                <a:spcPts val="600"/>
+              </a:spcAft>
+            </a:pPr>
+            <a:r>
+              <a:rPr sz="1500">
+                <a:solidFill>
+                  <a:srgbClr val="22282E"/>
+                </a:solidFill>
+              </a:rPr>
+              <a:t>•  Compara tamaños de clave RSA vs ECC para 128 bits de seguridad.</a:t>
+            </a:r>
+          </a:p>
+          <a:p>
+            <a:pPr>
+              <a:spcAft>
+                <a:spcPts val="600"/>
+              </a:spcAft>
+            </a:pPr>
+            <a:r>
+              <a:rPr sz="1500">
+                <a:solidFill>
+                  <a:srgbClr val="22282E"/>
+                </a:solidFill>
+              </a:rPr>
+              <a:t>•  Implementa cifrado híbrido RSA-OAEP + AES-GCM en Python.</a:t>
+            </a:r>
+          </a:p>
+          <a:p>
+            <a:pPr>
+              <a:spcAft>
+                <a:spcPts val="600"/>
+              </a:spcAft>
+            </a:pPr>
+            <a:r>
+              <a:rPr sz="1500">
+                <a:solidFill>
+                  <a:srgbClr val="22282E"/>
+                </a:solidFill>
+              </a:rPr>
+              <a:t>•  Investiga por qué claves RSA de 1024 bits ya no se consideran seguras.</a:t>
             </a:r>
           </a:p>
         </p:txBody>
@@ -3347,7 +3365,7 @@
                   <a:srgbClr val="0B3D2E"/>
                 </a:solidFill>
               </a:rPr>
-              <a:t>❓ Preguntas frecuentes</a:t>
+              <a:t>📝 Reto verificable</a:t>
             </a:r>
           </a:p>
         </p:txBody>
@@ -3385,82 +3403,7 @@
                   <a:srgbClr val="22282E"/>
                 </a:solidFill>
               </a:rPr>
-              <a:t>•  ❓ ¿Por qué no cifrar todo con RSA?</a:t>
-            </a:r>
-          </a:p>
-          <a:p>
-            <a:pPr>
-              <a:spcAft>
-                <a:spcPts val="600"/>
-              </a:spcAft>
-            </a:pPr>
-            <a:r>
-              <a:rPr sz="1500">
-                <a:solidFill>
-                  <a:srgbClr val="22282E"/>
-                </a:solidFill>
-              </a:rPr>
-              <a:t>•  Es lento y limitado al tamaño del módulo. Se usa para cifrar claves de sesión, no datos masivos.</a:t>
-            </a:r>
-          </a:p>
-          <a:p>
-            <a:pPr>
-              <a:spcAft>
-                <a:spcPts val="600"/>
-              </a:spcAft>
-            </a:pPr>
-            <a:r>
-              <a:rPr sz="1500">
-                <a:solidFill>
-                  <a:srgbClr val="22282E"/>
-                </a:solidFill>
-              </a:rPr>
-              <a:t>•  ❓ ¿RSA está roto?</a:t>
-            </a:r>
-          </a:p>
-          <a:p>
-            <a:pPr>
-              <a:spcAft>
-                <a:spcPts val="600"/>
-              </a:spcAft>
-            </a:pPr>
-            <a:r>
-              <a:rPr sz="1500">
-                <a:solidFill>
-                  <a:srgbClr val="22282E"/>
-                </a:solidFill>
-              </a:rPr>
-              <a:t>•  No para tamaños adecuados (≥3072 bits), pero es vulnerable a computación cuántica futura (Shor) y muchas implementaciones fallaron por mal padding.</a:t>
-            </a:r>
-          </a:p>
-          <a:p>
-            <a:pPr>
-              <a:spcAft>
-                <a:spcPts val="600"/>
-              </a:spcAft>
-            </a:pPr>
-            <a:r>
-              <a:rPr sz="1500">
-                <a:solidFill>
-                  <a:srgbClr val="22282E"/>
-                </a:solidFill>
-              </a:rPr>
-              <a:t>•  ❓ ¿OAEP o PKCS#1 v1.5?</a:t>
-            </a:r>
-          </a:p>
-          <a:p>
-            <a:pPr>
-              <a:spcAft>
-                <a:spcPts val="600"/>
-              </a:spcAft>
-            </a:pPr>
-            <a:r>
-              <a:rPr sz="1500">
-                <a:solidFill>
-                  <a:srgbClr val="22282E"/>
-                </a:solidFill>
-              </a:rPr>
-              <a:t>•  OAEP para cifrado nuevo; PKCS#1 v1.5 es propenso a ataques (Bleichenbacher) y se mantiene solo por compatibilidad.</a:t>
+              <a:t>•  Implementa un esquema de "sobre digital": cifra un archivo de varios MB con AES-GCM y protege la clave AES con RSA-OAEP; entrega un descifrador que recupere el archivo original. Criterio de…</a:t>
             </a:r>
           </a:p>
         </p:txBody>
@@ -3511,7 +3454,7 @@
                   <a:srgbClr val="0B3D2E"/>
                 </a:solidFill>
               </a:rPr>
-              <a:t>🔗 Referencias</a:t>
+              <a:t>⚠️ Errores comunes</a:t>
             </a:r>
           </a:p>
         </p:txBody>
@@ -3549,6 +3492,319 @@
                   <a:srgbClr val="22282E"/>
                 </a:solidFill>
               </a:rPr>
+              <a:t>•  data too large for key size — Intentas cifrar datos grandes con RSA; usa cifrado híbrido</a:t>
+            </a:r>
+          </a:p>
+          <a:p>
+            <a:pPr>
+              <a:spcAft>
+                <a:spcPts val="600"/>
+              </a:spcAft>
+            </a:pPr>
+            <a:r>
+              <a:rPr sz="1500">
+                <a:solidFill>
+                  <a:srgbClr val="22282E"/>
+                </a:solidFill>
+              </a:rPr>
+              <a:t>•  Cifrado determinista — Usaste RSA sin OAEP; aplica padding aleatorizado</a:t>
+            </a:r>
+          </a:p>
+          <a:p>
+            <a:pPr>
+              <a:spcAft>
+                <a:spcPts val="600"/>
+              </a:spcAft>
+            </a:pPr>
+            <a:r>
+              <a:rPr sz="1500">
+                <a:solidFill>
+                  <a:srgbClr val="22282E"/>
+                </a:solidFill>
+              </a:rPr>
+              <a:t>•  Clave de 1024 bits — Insegura; usa 3072 bits o migra a ECC</a:t>
+            </a:r>
+          </a:p>
+          <a:p>
+            <a:pPr>
+              <a:spcAft>
+                <a:spcPts val="600"/>
+              </a:spcAft>
+            </a:pPr>
+            <a:r>
+              <a:rPr sz="1500">
+                <a:solidFill>
+                  <a:srgbClr val="22282E"/>
+                </a:solidFill>
+              </a:rPr>
+              <a:t>•  Firmar cifrando con la privada "a mano" — Usa PSS, no operaciones RSA crudas</a:t>
+            </a:r>
+          </a:p>
+          <a:p>
+            <a:pPr>
+              <a:spcAft>
+                <a:spcPts val="600"/>
+              </a:spcAft>
+            </a:pPr>
+            <a:r>
+              <a:rPr sz="1500">
+                <a:solidFill>
+                  <a:srgbClr val="22282E"/>
+                </a:solidFill>
+              </a:rPr>
+              <a:t>•  Exponente d filtrado o p,q reutilizados — Compromete todo; genera claves con CSPRNG y no reutilices primos</a:t>
+            </a:r>
+          </a:p>
+        </p:txBody>
+      </p:sp>
+    </p:spTree>
+  </p:cSld>
+  <p:clrMapOvr>
+    <a:masterClrMapping/>
+  </p:clrMapOvr>
+</p:sld>
+</file>
+
+<file path=ppt/slides/slide13.xml><?xml version="1.0" encoding="utf-8"?>
+<p:sld xmlns:a="http://schemas.openxmlformats.org/drawingml/2006/main" xmlns:p="http://schemas.openxmlformats.org/presentationml/2006/main" xmlns:r="http://schemas.openxmlformats.org/officeDocument/2006/relationships">
+  <p:cSld>
+    <p:spTree>
+      <p:nvGrpSpPr>
+        <p:cNvPr id="1" name=""/>
+        <p:cNvGrpSpPr/>
+        <p:nvPr/>
+      </p:nvGrpSpPr>
+      <p:grpSpPr/>
+      <p:sp>
+        <p:nvSpPr>
+          <p:cNvPr id="2" name="TextBox 1"/>
+          <p:cNvSpPr txBox="1"/>
+          <p:nvPr/>
+        </p:nvSpPr>
+        <p:spPr>
+          <a:xfrm>
+            <a:off x="457200" y="320040"/>
+            <a:ext cx="8229600" cy="822960"/>
+          </a:xfrm>
+          <a:prstGeom prst="rect">
+            <a:avLst/>
+          </a:prstGeom>
+          <a:noFill/>
+        </p:spPr>
+        <p:txBody>
+          <a:bodyPr wrap="square">
+            <a:spAutoFit/>
+          </a:bodyPr>
+          <a:lstStyle/>
+          <a:p>
+            <a:r>
+              <a:rPr sz="2600" b="1">
+                <a:solidFill>
+                  <a:srgbClr val="0B3D2E"/>
+                </a:solidFill>
+              </a:rPr>
+              <a:t>❓ Preguntas frecuentes</a:t>
+            </a:r>
+          </a:p>
+        </p:txBody>
+      </p:sp>
+      <p:sp>
+        <p:nvSpPr>
+          <p:cNvPr id="3" name="TextBox 2"/>
+          <p:cNvSpPr txBox="1"/>
+          <p:nvPr/>
+        </p:nvSpPr>
+        <p:spPr>
+          <a:xfrm>
+            <a:off x="457200" y="1280160"/>
+            <a:ext cx="8229600" cy="4937760"/>
+          </a:xfrm>
+          <a:prstGeom prst="rect">
+            <a:avLst/>
+          </a:prstGeom>
+          <a:noFill/>
+        </p:spPr>
+        <p:txBody>
+          <a:bodyPr wrap="square">
+            <a:spAutoFit/>
+          </a:bodyPr>
+          <a:lstStyle/>
+          <a:p>
+            <a:pPr>
+              <a:spcAft>
+                <a:spcPts val="600"/>
+              </a:spcAft>
+            </a:pPr>
+            <a:r>
+              <a:rPr sz="1500">
+                <a:solidFill>
+                  <a:srgbClr val="22282E"/>
+                </a:solidFill>
+              </a:rPr>
+              <a:t>•  ❓ ¿Por qué no cifrar todo con RSA?</a:t>
+            </a:r>
+          </a:p>
+          <a:p>
+            <a:pPr>
+              <a:spcAft>
+                <a:spcPts val="600"/>
+              </a:spcAft>
+            </a:pPr>
+            <a:r>
+              <a:rPr sz="1500">
+                <a:solidFill>
+                  <a:srgbClr val="22282E"/>
+                </a:solidFill>
+              </a:rPr>
+              <a:t>•  Es lento y limitado al tamaño del módulo. Se usa para cifrar claves de sesión, no datos masivos.</a:t>
+            </a:r>
+          </a:p>
+          <a:p>
+            <a:pPr>
+              <a:spcAft>
+                <a:spcPts val="600"/>
+              </a:spcAft>
+            </a:pPr>
+            <a:r>
+              <a:rPr sz="1500">
+                <a:solidFill>
+                  <a:srgbClr val="22282E"/>
+                </a:solidFill>
+              </a:rPr>
+              <a:t>•  ❓ ¿RSA está roto?</a:t>
+            </a:r>
+          </a:p>
+          <a:p>
+            <a:pPr>
+              <a:spcAft>
+                <a:spcPts val="600"/>
+              </a:spcAft>
+            </a:pPr>
+            <a:r>
+              <a:rPr sz="1500">
+                <a:solidFill>
+                  <a:srgbClr val="22282E"/>
+                </a:solidFill>
+              </a:rPr>
+              <a:t>•  No para tamaños adecuados (≥3072 bits), pero es vulnerable a computación cuántica futura (Shor) y muchas implementaciones fallaron por mal padding.</a:t>
+            </a:r>
+          </a:p>
+          <a:p>
+            <a:pPr>
+              <a:spcAft>
+                <a:spcPts val="600"/>
+              </a:spcAft>
+            </a:pPr>
+            <a:r>
+              <a:rPr sz="1500">
+                <a:solidFill>
+                  <a:srgbClr val="22282E"/>
+                </a:solidFill>
+              </a:rPr>
+              <a:t>•  ❓ ¿OAEP o PKCS#1 v1.5?</a:t>
+            </a:r>
+          </a:p>
+          <a:p>
+            <a:pPr>
+              <a:spcAft>
+                <a:spcPts val="600"/>
+              </a:spcAft>
+            </a:pPr>
+            <a:r>
+              <a:rPr sz="1500">
+                <a:solidFill>
+                  <a:srgbClr val="22282E"/>
+                </a:solidFill>
+              </a:rPr>
+              <a:t>•  OAEP para cifrado nuevo; PKCS#1 v1.5 es propenso a ataques (Bleichenbacher) y se mantiene solo por compatibilidad.</a:t>
+            </a:r>
+          </a:p>
+        </p:txBody>
+      </p:sp>
+    </p:spTree>
+  </p:cSld>
+  <p:clrMapOvr>
+    <a:masterClrMapping/>
+  </p:clrMapOvr>
+</p:sld>
+</file>
+
+<file path=ppt/slides/slide14.xml><?xml version="1.0" encoding="utf-8"?>
+<p:sld xmlns:a="http://schemas.openxmlformats.org/drawingml/2006/main" xmlns:p="http://schemas.openxmlformats.org/presentationml/2006/main" xmlns:r="http://schemas.openxmlformats.org/officeDocument/2006/relationships">
+  <p:cSld>
+    <p:spTree>
+      <p:nvGrpSpPr>
+        <p:cNvPr id="1" name=""/>
+        <p:cNvGrpSpPr/>
+        <p:nvPr/>
+      </p:nvGrpSpPr>
+      <p:grpSpPr/>
+      <p:sp>
+        <p:nvSpPr>
+          <p:cNvPr id="2" name="TextBox 1"/>
+          <p:cNvSpPr txBox="1"/>
+          <p:nvPr/>
+        </p:nvSpPr>
+        <p:spPr>
+          <a:xfrm>
+            <a:off x="457200" y="320040"/>
+            <a:ext cx="8229600" cy="822960"/>
+          </a:xfrm>
+          <a:prstGeom prst="rect">
+            <a:avLst/>
+          </a:prstGeom>
+          <a:noFill/>
+        </p:spPr>
+        <p:txBody>
+          <a:bodyPr wrap="square">
+            <a:spAutoFit/>
+          </a:bodyPr>
+          <a:lstStyle/>
+          <a:p>
+            <a:r>
+              <a:rPr sz="2600" b="1">
+                <a:solidFill>
+                  <a:srgbClr val="0B3D2E"/>
+                </a:solidFill>
+              </a:rPr>
+              <a:t>🔗 Referencias</a:t>
+            </a:r>
+          </a:p>
+        </p:txBody>
+      </p:sp>
+      <p:sp>
+        <p:nvSpPr>
+          <p:cNvPr id="3" name="TextBox 2"/>
+          <p:cNvSpPr txBox="1"/>
+          <p:nvPr/>
+        </p:nvSpPr>
+        <p:spPr>
+          <a:xfrm>
+            <a:off x="457200" y="1280160"/>
+            <a:ext cx="8229600" cy="4937760"/>
+          </a:xfrm>
+          <a:prstGeom prst="rect">
+            <a:avLst/>
+          </a:prstGeom>
+          <a:noFill/>
+        </p:spPr>
+        <p:txBody>
+          <a:bodyPr wrap="square">
+            <a:spAutoFit/>
+          </a:bodyPr>
+          <a:lstStyle/>
+          <a:p>
+            <a:pPr>
+              <a:spcAft>
+                <a:spcPts val="600"/>
+              </a:spcAft>
+            </a:pPr>
+            <a:r>
+              <a:rPr sz="1500">
+                <a:solidFill>
+                  <a:srgbClr val="22282E"/>
+                </a:solidFill>
+              </a:rPr>
               <a:t>•  Aumasson, Serious Cryptography, cap. 10.</a:t>
             </a:r>
           </a:p>
@@ -3599,6 +3855,81 @@
           </a:p>
         </p:txBody>
       </p:sp>
+    </p:spTree>
+  </p:cSld>
+  <p:clrMapOvr>
+    <a:masterClrMapping/>
+  </p:clrMapOvr>
+</p:sld>
+</file>
+
+<file path=ppt/slides/slide15.xml><?xml version="1.0" encoding="utf-8"?>
+<p:sld xmlns:a="http://schemas.openxmlformats.org/drawingml/2006/main" xmlns:p="http://schemas.openxmlformats.org/presentationml/2006/main" xmlns:r="http://schemas.openxmlformats.org/officeDocument/2006/relationships">
+  <p:cSld>
+    <p:spTree>
+      <p:nvGrpSpPr>
+        <p:cNvPr id="1" name=""/>
+        <p:cNvGrpSpPr/>
+        <p:nvPr/>
+      </p:nvGrpSpPr>
+      <p:grpSpPr/>
+      <p:sp>
+        <p:nvSpPr>
+          <p:cNvPr id="2" name="TextBox 1"/>
+          <p:cNvSpPr txBox="1"/>
+          <p:nvPr/>
+        </p:nvSpPr>
+        <p:spPr>
+          <a:xfrm>
+            <a:off x="457200" y="274320"/>
+            <a:ext cx="8229600" cy="640080"/>
+          </a:xfrm>
+          <a:prstGeom prst="rect">
+            <a:avLst/>
+          </a:prstGeom>
+          <a:noFill/>
+        </p:spPr>
+        <p:txBody>
+          <a:bodyPr wrap="square">
+            <a:spAutoFit/>
+          </a:bodyPr>
+          <a:lstStyle/>
+          <a:p>
+            <a:r>
+              <a:rPr sz="2200" b="1">
+                <a:solidFill>
+                  <a:srgbClr val="0B3D2E"/>
+                </a:solidFill>
+              </a:rPr>
+              <a:t>Diagrama de la clase</a:t>
+            </a:r>
+          </a:p>
+        </p:txBody>
+      </p:sp>
+      <p:pic>
+        <p:nvPicPr>
+          <p:cNvPr id="3" name="Picture 2" descr="65ccd4136450c8d5.png"/>
+          <p:cNvPicPr>
+            <a:picLocks noChangeAspect="1"/>
+          </p:cNvPicPr>
+          <p:nvPr/>
+        </p:nvPicPr>
+        <p:blipFill>
+          <a:blip r:embed="rId2"/>
+          <a:stretch>
+            <a:fillRect/>
+          </a:stretch>
+        </p:blipFill>
+        <p:spPr>
+          <a:xfrm>
+            <a:off x="2139193" y="1097280"/>
+            <a:ext cx="4865614" cy="5303520"/>
+          </a:xfrm>
+          <a:prstGeom prst="rect">
+            <a:avLst/>
+          </a:prstGeom>
+        </p:spPr>
+      </p:pic>
     </p:spTree>
   </p:cSld>
   <p:clrMapOvr>
@@ -3683,7 +4014,7 @@
                   <a:srgbClr val="22282E"/>
                 </a:solidFill>
               </a:rPr>
-              <a:t>•  Comprender la criptografía de clave pública a través de RSA: cómo se genera un par de claves a partir de dos primos grandes, en qué problema matemático se apoya su seguridad (factorización), y por qué RSA "de libro" (textbook) es inseguro y debe usarse con padding OAEP para cifrado y PSS para firma. El alumno generará claves con OpenSSL y verá el porqué de cada decisión.</a:t>
+              <a:t>•  Comprender la criptografía de clave pública a través de RSA: cómo se genera un par de claves a partir de dos primos grandes, en qué problema matemático se apoya su seguridad (factorización), y por…</a:t>
             </a:r>
           </a:p>
         </p:txBody>
@@ -4077,7 +4408,7 @@
                   <a:srgbClr val="0B3D2E"/>
                 </a:solidFill>
               </a:rPr>
-              <a:t>📖 Definiciones y características</a:t>
+              <a:t>🧠 Explicación en profundidad</a:t>
             </a:r>
           </a:p>
         </p:txBody>
@@ -4115,97 +4446,97 @@
                   <a:srgbClr val="22282E"/>
                 </a:solidFill>
               </a:rPr>
-              <a:t>•  Clave pública/privada: par matemáticamente relacionado; lo que cifra una descifra la otra. Característica: elimina el problema del canal secreto previo.</a:t>
-            </a:r>
-          </a:p>
-          <a:p>
-            <a:pPr>
-              <a:spcAft>
-                <a:spcPts val="600"/>
-              </a:spcAft>
-            </a:pPr>
-            <a:r>
-              <a:rPr sz="1500">
-                <a:solidFill>
-                  <a:srgbClr val="22282E"/>
-                </a:solidFill>
-              </a:rPr>
-              <a:t>•  RSA: criptosistema basado en n = p·q (primos grandes), exponente público e (típico 65537) y privado d. Cifrado: c = mᵉ mod n.</a:t>
-            </a:r>
-          </a:p>
-          <a:p>
-            <a:pPr>
-              <a:spcAft>
-                <a:spcPts val="600"/>
-              </a:spcAft>
-            </a:pPr>
-            <a:r>
-              <a:rPr sz="1500">
-                <a:solidFill>
-                  <a:srgbClr val="22282E"/>
-                </a:solidFill>
-              </a:rPr>
-              <a:t>•  Función φ de Euler: φ(n) = (p-1)(q-1); se usa para calcular d como inverso de e.</a:t>
-            </a:r>
-          </a:p>
-          <a:p>
-            <a:pPr>
-              <a:spcAft>
-                <a:spcPts val="600"/>
-              </a:spcAft>
-            </a:pPr>
-            <a:r>
-              <a:rPr sz="1500">
-                <a:solidFill>
-                  <a:srgbClr val="22282E"/>
-                </a:solidFill>
-              </a:rPr>
-              <a:t>•  RSA textbook: RSA sin padding; determinista y maleable → inseguro. Nunca usar directo.</a:t>
-            </a:r>
-          </a:p>
-          <a:p>
-            <a:pPr>
-              <a:spcAft>
-                <a:spcPts val="600"/>
-              </a:spcAft>
-            </a:pPr>
-            <a:r>
-              <a:rPr sz="1500">
-                <a:solidFill>
-                  <a:srgbClr val="22282E"/>
-                </a:solidFill>
-              </a:rPr>
-              <a:t>•  OAEP (Optimal Asymmetric Encryption Padding): relleno aleatorizado que hace el cifrado no determinista y resistente. Estándar para cifrar con RSA.</a:t>
-            </a:r>
-          </a:p>
-          <a:p>
-            <a:pPr>
-              <a:spcAft>
-                <a:spcPts val="600"/>
-              </a:spcAft>
-            </a:pPr>
-            <a:r>
-              <a:rPr sz="1500">
-                <a:solidFill>
-                  <a:srgbClr val="22282E"/>
-                </a:solidFill>
-              </a:rPr>
-              <a:t>•  PSS (Probabilistic Signature Scheme): esquema de padding para firmas RSA, con prueba de seguridad sólida.</a:t>
-            </a:r>
-          </a:p>
-          <a:p>
-            <a:pPr>
-              <a:spcAft>
-                <a:spcPts val="600"/>
-              </a:spcAft>
-            </a:pPr>
-            <a:r>
-              <a:rPr sz="1500">
-                <a:solidFill>
-                  <a:srgbClr val="22282E"/>
-                </a:solidFill>
-              </a:rPr>
-              <a:t>•  Cifrado híbrido: RSA cifra una clave simétrica aleatoria y AES cifra los datos; combina lo mejor de ambos.</a:t>
+              <a:t>•  Toda la criptografía simétrica arrastra un problema logístico insalvable: para hablar en</a:t>
+            </a:r>
+          </a:p>
+          <a:p>
+            <a:pPr>
+              <a:spcAft>
+                <a:spcPts val="600"/>
+              </a:spcAft>
+            </a:pPr>
+            <a:r>
+              <a:rPr sz="1500">
+                <a:solidFill>
+                  <a:srgbClr val="22282E"/>
+                </a:solidFill>
+              </a:rPr>
+              <a:t>•  secreto hay que compartir antes una clave, y compartirla exige un canal seguro que es</a:t>
+            </a:r>
+          </a:p>
+          <a:p>
+            <a:pPr>
+              <a:spcAft>
+                <a:spcPts val="600"/>
+              </a:spcAft>
+            </a:pPr>
+            <a:r>
+              <a:rPr sz="1500">
+                <a:solidFill>
+                  <a:srgbClr val="22282E"/>
+                </a:solidFill>
+              </a:rPr>
+              <a:t>•  justo lo que no se tiene. Peor aún, con n participantes hacen falta n(n−1)/2 claves</a:t>
+            </a:r>
+          </a:p>
+          <a:p>
+            <a:pPr>
+              <a:spcAft>
+                <a:spcPts val="600"/>
+              </a:spcAft>
+            </a:pPr>
+            <a:r>
+              <a:rPr sz="1500">
+                <a:solidFill>
+                  <a:srgbClr val="22282E"/>
+                </a:solidFill>
+              </a:rPr>
+              <a:t>•  distintas. La criptografía de clave pública (Diffie y Hellman, 1976; RSA, 1977) rompe ese</a:t>
+            </a:r>
+          </a:p>
+          <a:p>
+            <a:pPr>
+              <a:spcAft>
+                <a:spcPts val="600"/>
+              </a:spcAft>
+            </a:pPr>
+            <a:r>
+              <a:rPr sz="1500">
+                <a:solidFill>
+                  <a:srgbClr val="22282E"/>
+                </a:solidFill>
+              </a:rPr>
+              <a:t>•  nudo con una idea contraintuitiva: dos claves relacionadas matemáticamente, una</a:t>
+            </a:r>
+          </a:p>
+          <a:p>
+            <a:pPr>
+              <a:spcAft>
+                <a:spcPts val="600"/>
+              </a:spcAft>
+            </a:pPr>
+            <a:r>
+              <a:rPr sz="1500">
+                <a:solidFill>
+                  <a:srgbClr val="22282E"/>
+                </a:solidFill>
+              </a:rPr>
+              <a:t>•  publicable y otra secreta, de modo que lo que cifra una solo lo descifra la otra. Ya no</a:t>
+            </a:r>
+          </a:p>
+          <a:p>
+            <a:pPr>
+              <a:spcAft>
+                <a:spcPts val="600"/>
+              </a:spcAft>
+            </a:pPr>
+            <a:r>
+              <a:rPr sz="1500">
+                <a:solidFill>
+                  <a:srgbClr val="22282E"/>
+                </a:solidFill>
+              </a:rPr>
+              <a:t>•  hay que acordar nada en privado; basta con publicar la clave pública.</a:t>
             </a:r>
           </a:p>
         </p:txBody>
@@ -4256,7 +4587,7 @@
                   <a:srgbClr val="0B3D2E"/>
                 </a:solidFill>
               </a:rPr>
-              <a:t>🧰 Herramientas y preparación</a:t>
+              <a:t>📖 Definiciones y características</a:t>
             </a:r>
           </a:p>
         </p:txBody>
@@ -4294,37 +4625,97 @@
                   <a:srgbClr val="22282E"/>
                 </a:solidFill>
               </a:rPr>
-              <a:t>•  openssl version</a:t>
-            </a:r>
-          </a:p>
-          <a:p>
-            <a:pPr>
-              <a:spcAft>
-                <a:spcPts val="600"/>
-              </a:spcAft>
-            </a:pPr>
-            <a:r>
-              <a:rPr sz="1500">
-                <a:solidFill>
-                  <a:srgbClr val="22282E"/>
-                </a:solidFill>
-              </a:rPr>
-              <a:t>•  pip install cryptography</a:t>
-            </a:r>
-          </a:p>
-          <a:p>
-            <a:pPr>
-              <a:spcAft>
-                <a:spcPts val="600"/>
-              </a:spcAft>
-            </a:pPr>
-            <a:r>
-              <a:rPr sz="1500">
-                <a:solidFill>
-                  <a:srgbClr val="22282E"/>
-                </a:solidFill>
-              </a:rPr>
-              <a:t>•  Genera y prueba solo con claves propias. Nunca uses claves de terceros sin autorización.</a:t>
+              <a:t>•  Clave pública/privada: par matemáticamente relacionado; lo que cifra una descifra la otra. Característica: elimina el problema del canal secreto previo.</a:t>
+            </a:r>
+          </a:p>
+          <a:p>
+            <a:pPr>
+              <a:spcAft>
+                <a:spcPts val="600"/>
+              </a:spcAft>
+            </a:pPr>
+            <a:r>
+              <a:rPr sz="1500">
+                <a:solidFill>
+                  <a:srgbClr val="22282E"/>
+                </a:solidFill>
+              </a:rPr>
+              <a:t>•  RSA: criptosistema basado en n = p·q (primos grandes), exponente público e (típico 65537) y privado d. Cifrado: c = mᵉ mod n.</a:t>
+            </a:r>
+          </a:p>
+          <a:p>
+            <a:pPr>
+              <a:spcAft>
+                <a:spcPts val="600"/>
+              </a:spcAft>
+            </a:pPr>
+            <a:r>
+              <a:rPr sz="1500">
+                <a:solidFill>
+                  <a:srgbClr val="22282E"/>
+                </a:solidFill>
+              </a:rPr>
+              <a:t>•  Función φ de Euler: φ(n) = (p-1)(q-1); se usa para calcular d como inverso de e.</a:t>
+            </a:r>
+          </a:p>
+          <a:p>
+            <a:pPr>
+              <a:spcAft>
+                <a:spcPts val="600"/>
+              </a:spcAft>
+            </a:pPr>
+            <a:r>
+              <a:rPr sz="1500">
+                <a:solidFill>
+                  <a:srgbClr val="22282E"/>
+                </a:solidFill>
+              </a:rPr>
+              <a:t>•  RSA textbook: RSA sin padding; determinista y maleable → inseguro. Nunca usar directo.</a:t>
+            </a:r>
+          </a:p>
+          <a:p>
+            <a:pPr>
+              <a:spcAft>
+                <a:spcPts val="600"/>
+              </a:spcAft>
+            </a:pPr>
+            <a:r>
+              <a:rPr sz="1500">
+                <a:solidFill>
+                  <a:srgbClr val="22282E"/>
+                </a:solidFill>
+              </a:rPr>
+              <a:t>•  OAEP (Optimal Asymmetric Encryption Padding): relleno aleatorizado que hace el cifrado no determinista y resistente. Estándar para cifrar con RSA.</a:t>
+            </a:r>
+          </a:p>
+          <a:p>
+            <a:pPr>
+              <a:spcAft>
+                <a:spcPts val="600"/>
+              </a:spcAft>
+            </a:pPr>
+            <a:r>
+              <a:rPr sz="1500">
+                <a:solidFill>
+                  <a:srgbClr val="22282E"/>
+                </a:solidFill>
+              </a:rPr>
+              <a:t>•  PSS (Probabilistic Signature Scheme): esquema de padding para firmas RSA, con prueba de seguridad sólida.</a:t>
+            </a:r>
+          </a:p>
+          <a:p>
+            <a:pPr>
+              <a:spcAft>
+                <a:spcPts val="600"/>
+              </a:spcAft>
+            </a:pPr>
+            <a:r>
+              <a:rPr sz="1500">
+                <a:solidFill>
+                  <a:srgbClr val="22282E"/>
+                </a:solidFill>
+              </a:rPr>
+              <a:t>•  Cifrado híbrido: RSA cifra una clave simétrica aleatoria y AES cifra los datos; combina lo mejor de ambos.</a:t>
             </a:r>
           </a:p>
         </p:txBody>
@@ -4375,7 +4766,7 @@
                   <a:srgbClr val="0B3D2E"/>
                 </a:solidFill>
               </a:rPr>
-              <a:t>🧪 Laboratorio guiado</a:t>
+              <a:t>📔 Glosario</a:t>
             </a:r>
           </a:p>
         </p:txBody>
@@ -4413,97 +4804,97 @@
                   <a:srgbClr val="22282E"/>
                 </a:solidFill>
               </a:rPr>
-              <a:t>•  Genera un par RSA de 3072 bits (equivalente a ~128 bits de seguridad simétrica):</a:t>
-            </a:r>
-          </a:p>
-          <a:p>
-            <a:pPr>
-              <a:spcAft>
-                <a:spcPts val="600"/>
-              </a:spcAft>
-            </a:pPr>
-            <a:r>
-              <a:rPr sz="1500">
-                <a:solidFill>
-                  <a:srgbClr val="22282E"/>
-                </a:solidFill>
-              </a:rPr>
-              <a:t>•  openssl genpkey -algorithm RSA -pkeyopt rsakeygenbits:3072 -out priv.pem</a:t>
-            </a:r>
-          </a:p>
-          <a:p>
-            <a:pPr>
-              <a:spcAft>
-                <a:spcPts val="600"/>
-              </a:spcAft>
-            </a:pPr>
-            <a:r>
-              <a:rPr sz="1500">
-                <a:solidFill>
-                  <a:srgbClr val="22282E"/>
-                </a:solidFill>
-              </a:rPr>
-              <a:t>•  openssl rsa -in priv.pem -pubout -out pub.pem</a:t>
-            </a:r>
-          </a:p>
-          <a:p>
-            <a:pPr>
-              <a:spcAft>
-                <a:spcPts val="600"/>
-              </a:spcAft>
-            </a:pPr>
-            <a:r>
-              <a:rPr sz="1500">
-                <a:solidFill>
-                  <a:srgbClr val="22282E"/>
-                </a:solidFill>
-              </a:rPr>
-              <a:t>•  openssl rsa -in priv.pem -text -noout | head -n 20</a:t>
-            </a:r>
-          </a:p>
-          <a:p>
-            <a:pPr>
-              <a:spcAft>
-                <a:spcPts val="600"/>
-              </a:spcAft>
-            </a:pPr>
-            <a:r>
-              <a:rPr sz="1500">
-                <a:solidFill>
-                  <a:srgbClr val="22282E"/>
-                </a:solidFill>
-              </a:rPr>
-              <a:t>•  Cifra con OAEP un mensaje corto (una clave de sesión):</a:t>
-            </a:r>
-          </a:p>
-          <a:p>
-            <a:pPr>
-              <a:spcAft>
-                <a:spcPts val="600"/>
-              </a:spcAft>
-            </a:pPr>
-            <a:r>
-              <a:rPr sz="1500">
-                <a:solidFill>
-                  <a:srgbClr val="22282E"/>
-                </a:solidFill>
-              </a:rPr>
-              <a:t>•  echo -n "clave-de-sesion-32-bytes........" &gt; k.bin</a:t>
-            </a:r>
-          </a:p>
-          <a:p>
-            <a:pPr>
-              <a:spcAft>
-                <a:spcPts val="600"/>
-              </a:spcAft>
-            </a:pPr>
-            <a:r>
-              <a:rPr sz="1500">
-                <a:solidFill>
-                  <a:srgbClr val="22282E"/>
-                </a:solidFill>
-              </a:rPr>
-              <a:t>•  openssl pkeyutl -encrypt -pubin -inkey pub.pem \</a:t>
+              <a:t>•  Término — Definición concisa</a:t>
+            </a:r>
+          </a:p>
+          <a:p>
+            <a:pPr>
+              <a:spcAft>
+                <a:spcPts val="600"/>
+              </a:spcAft>
+            </a:pPr>
+            <a:r>
+              <a:rPr sz="1500">
+                <a:solidFill>
+                  <a:srgbClr val="22282E"/>
+                </a:solidFill>
+              </a:rPr>
+              <a:t>•  Clave pública / privada — Par relacionado: una se publica, la otra se guarda</a:t>
+            </a:r>
+          </a:p>
+          <a:p>
+            <a:pPr>
+              <a:spcAft>
+                <a:spcPts val="600"/>
+              </a:spcAft>
+            </a:pPr>
+            <a:r>
+              <a:rPr sz="1500">
+                <a:solidFill>
+                  <a:srgbClr val="22282E"/>
+                </a:solidFill>
+              </a:rPr>
+              <a:t>•  Función unidireccional con trampilla — Fácil de calcular, difícil de invertir salvo con un secreto</a:t>
+            </a:r>
+          </a:p>
+          <a:p>
+            <a:pPr>
+              <a:spcAft>
+                <a:spcPts val="600"/>
+              </a:spcAft>
+            </a:pPr>
+            <a:r>
+              <a:rPr sz="1500">
+                <a:solidFill>
+                  <a:srgbClr val="22282E"/>
+                </a:solidFill>
+              </a:rPr>
+              <a:t>•  n (módulo) — Producto de dos primos grandes; parte de ambas claves</a:t>
+            </a:r>
+          </a:p>
+          <a:p>
+            <a:pPr>
+              <a:spcAft>
+                <a:spcPts val="600"/>
+              </a:spcAft>
+            </a:pPr>
+            <a:r>
+              <a:rPr sz="1500">
+                <a:solidFill>
+                  <a:srgbClr val="22282E"/>
+                </a:solidFill>
+              </a:rPr>
+              <a:t>•  e (exponente público) — Coprimo con φ(n); habitualmente 65537</a:t>
+            </a:r>
+          </a:p>
+          <a:p>
+            <a:pPr>
+              <a:spcAft>
+                <a:spcPts val="600"/>
+              </a:spcAft>
+            </a:pPr>
+            <a:r>
+              <a:rPr sz="1500">
+                <a:solidFill>
+                  <a:srgbClr val="22282E"/>
+                </a:solidFill>
+              </a:rPr>
+              <a:t>•  d (exponente privado) — Inverso de e módulo φ(n)</a:t>
+            </a:r>
+          </a:p>
+          <a:p>
+            <a:pPr>
+              <a:spcAft>
+                <a:spcPts val="600"/>
+              </a:spcAft>
+            </a:pPr>
+            <a:r>
+              <a:rPr sz="1500">
+                <a:solidFill>
+                  <a:srgbClr val="22282E"/>
+                </a:solidFill>
+              </a:rPr>
+              <a:t>•  φ(n) — Función de Euler; (p−1)(q−1) para RSA</a:t>
             </a:r>
           </a:p>
         </p:txBody>
@@ -4554,7 +4945,7 @@
                   <a:srgbClr val="0B3D2E"/>
                 </a:solidFill>
               </a:rPr>
-              <a:t>✍️ Ejercicios</a:t>
+              <a:t>🧰 Herramientas y preparación</a:t>
             </a:r>
           </a:p>
         </p:txBody>
@@ -4592,82 +4983,7 @@
                   <a:srgbClr val="22282E"/>
                 </a:solidFill>
               </a:rPr>
-              <a:t>•  Calcula a mano un RSA de juguete con p=61, q=53, e=17; halla d y cifra m=65.</a:t>
-            </a:r>
-          </a:p>
-          <a:p>
-            <a:pPr>
-              <a:spcAft>
-                <a:spcPts val="600"/>
-              </a:spcAft>
-            </a:pPr>
-            <a:r>
-              <a:rPr sz="1500">
-                <a:solidFill>
-                  <a:srgbClr val="22282E"/>
-                </a:solidFill>
-              </a:rPr>
-              <a:t>•  Explica por qué e=65537 es una elección común.</a:t>
-            </a:r>
-          </a:p>
-          <a:p>
-            <a:pPr>
-              <a:spcAft>
-                <a:spcPts val="600"/>
-              </a:spcAft>
-            </a:pPr>
-            <a:r>
-              <a:rPr sz="1500">
-                <a:solidFill>
-                  <a:srgbClr val="22282E"/>
-                </a:solidFill>
-              </a:rPr>
-              <a:t>•  ¿Por qué RSA textbook es maleable? Da un ejemplo con multiplicación.</a:t>
-            </a:r>
-          </a:p>
-          <a:p>
-            <a:pPr>
-              <a:spcAft>
-                <a:spcPts val="600"/>
-              </a:spcAft>
-            </a:pPr>
-            <a:r>
-              <a:rPr sz="1500">
-                <a:solidFill>
-                  <a:srgbClr val="22282E"/>
-                </a:solidFill>
-              </a:rPr>
-              <a:t>•  Compara tamaños de clave RSA vs ECC para 128 bits de seguridad.</a:t>
-            </a:r>
-          </a:p>
-          <a:p>
-            <a:pPr>
-              <a:spcAft>
-                <a:spcPts val="600"/>
-              </a:spcAft>
-            </a:pPr>
-            <a:r>
-              <a:rPr sz="1500">
-                <a:solidFill>
-                  <a:srgbClr val="22282E"/>
-                </a:solidFill>
-              </a:rPr>
-              <a:t>•  Implementa cifrado híbrido RSA-OAEP + AES-GCM en Python.</a:t>
-            </a:r>
-          </a:p>
-          <a:p>
-            <a:pPr>
-              <a:spcAft>
-                <a:spcPts val="600"/>
-              </a:spcAft>
-            </a:pPr>
-            <a:r>
-              <a:rPr sz="1500">
-                <a:solidFill>
-                  <a:srgbClr val="22282E"/>
-                </a:solidFill>
-              </a:rPr>
-              <a:t>•  Investiga por qué claves RSA de 1024 bits ya no se consideran seguras.</a:t>
+              <a:t>•  Genera y prueba solo con claves propias. Nunca uses claves de terceros sin autorización.</a:t>
             </a:r>
           </a:p>
         </p:txBody>
@@ -4718,7 +5034,7 @@
                   <a:srgbClr val="0B3D2E"/>
                 </a:solidFill>
               </a:rPr>
-              <a:t>📝 Reto verificable</a:t>
+              <a:t>🧪 Laboratorio guiado</a:t>
             </a:r>
           </a:p>
         </p:txBody>
@@ -4756,7 +5072,52 @@
                   <a:srgbClr val="22282E"/>
                 </a:solidFill>
               </a:rPr>
-              <a:t>•  Implementa un esquema de "sobre digital": cifra un archivo de varios MB con AES-GCM y protege la clave AES con RSA-OAEP; entrega un descifrador que recupere el archivo original. Criterio de aceptación: el archivo descifrado es idéntico byte a byte al original y la clave AES nunca aparece en claro en disco.</a:t>
+              <a:t>•  Genera un par RSA de 3072 bits (equivalente a ~128 bits de seguridad simétrica):</a:t>
+            </a:r>
+          </a:p>
+          <a:p>
+            <a:pPr>
+              <a:spcAft>
+                <a:spcPts val="600"/>
+              </a:spcAft>
+            </a:pPr>
+            <a:r>
+              <a:rPr sz="1500">
+                <a:solidFill>
+                  <a:srgbClr val="22282E"/>
+                </a:solidFill>
+              </a:rPr>
+              <a:t>•  Cifra con OAEP un mensaje corto (una clave de sesión):</a:t>
+            </a:r>
+          </a:p>
+          <a:p>
+            <a:pPr>
+              <a:spcAft>
+                <a:spcPts val="600"/>
+              </a:spcAft>
+            </a:pPr>
+            <a:r>
+              <a:rPr sz="1500">
+                <a:solidFill>
+                  <a:srgbClr val="22282E"/>
+                </a:solidFill>
+              </a:rPr>
+              <a:t>•  Observa el determinismo del RSA textbook (didáctico): cifra dos veces el mismo mensaje sin padding con un módulo pequeño en Python y comprueba que da idéntico cifrado → filtra igualdad.</a:t>
+            </a:r>
+          </a:p>
+          <a:p>
+            <a:pPr>
+              <a:spcAft>
+                <a:spcPts val="600"/>
+              </a:spcAft>
+            </a:pPr>
+            <a:r>
+              <a:rPr sz="1500">
+                <a:solidFill>
+                  <a:srgbClr val="22282E"/>
+                </a:solidFill>
+              </a:rPr>
+              <a:t>•  Cifrado híbrido: genera una clave AES aleatoria, cifra un archivo grande con AES-GCM y cifra solo la clave AES con RSA-OAEP. Documenta por qué RSA no cifra el archivo entero (límite de tamaño y…</a:t>
             </a:r>
           </a:p>
         </p:txBody>
